--- a/進捗/2026_summer企画書.pptx
+++ b/進捗/2026_summer企画書.pptx
@@ -10,8 +10,9 @@
     <p:sldId id="259" r:id="rId4"/>
     <p:sldId id="258" r:id="rId5"/>
     <p:sldId id="260" r:id="rId6"/>
-    <p:sldId id="261" r:id="rId7"/>
-    <p:sldId id="262" r:id="rId8"/>
+    <p:sldId id="263" r:id="rId7"/>
+    <p:sldId id="261" r:id="rId8"/>
+    <p:sldId id="262" r:id="rId9"/>
   </p:sldIdLst>
   <p:sldSz cx="12192000" cy="6858000"/>
   <p:notesSz cx="6858000" cy="9144000"/>
@@ -310,7 +311,7 @@
             <a:fld id="{E80C50CD-E178-4744-9B35-B2F624D6C5E9}" type="datetimeFigureOut">
               <a:rPr lang="en-US" smtClean="0"/>
               <a:pPr/>
-              <a:t>5/20/2026</a:t>
+              <a:t>5/21/2026</a:t>
             </a:fld>
             <a:endParaRPr lang="en-US"/>
           </a:p>
@@ -748,7 +749,7 @@
             <a:fld id="{E80C50CD-E178-4744-9B35-B2F624D6C5E9}" type="datetimeFigureOut">
               <a:rPr lang="en-US" smtClean="0"/>
               <a:pPr/>
-              <a:t>5/20/2026</a:t>
+              <a:t>5/21/2026</a:t>
             </a:fld>
             <a:endParaRPr lang="en-US"/>
           </a:p>
@@ -1000,7 +1001,7 @@
             <a:fld id="{E80C50CD-E178-4744-9B35-B2F624D6C5E9}" type="datetimeFigureOut">
               <a:rPr lang="en-US" smtClean="0"/>
               <a:pPr/>
-              <a:t>5/20/2026</a:t>
+              <a:t>5/21/2026</a:t>
             </a:fld>
             <a:endParaRPr lang="en-US"/>
           </a:p>
@@ -1310,7 +1311,7 @@
             <a:fld id="{E80C50CD-E178-4744-9B35-B2F624D6C5E9}" type="datetimeFigureOut">
               <a:rPr lang="en-US" smtClean="0"/>
               <a:pPr/>
-              <a:t>5/20/2026</a:t>
+              <a:t>5/21/2026</a:t>
             </a:fld>
             <a:endParaRPr lang="en-US"/>
           </a:p>
@@ -1630,7 +1631,7 @@
             <a:fld id="{E80C50CD-E178-4744-9B35-B2F624D6C5E9}" type="datetimeFigureOut">
               <a:rPr lang="en-US" smtClean="0"/>
               <a:pPr/>
-              <a:t>5/20/2026</a:t>
+              <a:t>5/21/2026</a:t>
             </a:fld>
             <a:endParaRPr lang="en-US"/>
           </a:p>
@@ -1934,7 +1935,7 @@
             <a:fld id="{E80C50CD-E178-4744-9B35-B2F624D6C5E9}" type="datetimeFigureOut">
               <a:rPr lang="en-US" smtClean="0"/>
               <a:pPr/>
-              <a:t>5/20/2026</a:t>
+              <a:t>5/21/2026</a:t>
             </a:fld>
             <a:endParaRPr lang="en-US"/>
           </a:p>
@@ -2303,7 +2304,7 @@
             <a:fld id="{E80C50CD-E178-4744-9B35-B2F624D6C5E9}" type="datetimeFigureOut">
               <a:rPr lang="en-US" smtClean="0"/>
               <a:pPr/>
-              <a:t>5/20/2026</a:t>
+              <a:t>5/21/2026</a:t>
             </a:fld>
             <a:endParaRPr lang="en-US"/>
           </a:p>
@@ -2511,7 +2512,7 @@
             <a:fld id="{E80C50CD-E178-4744-9B35-B2F624D6C5E9}" type="datetimeFigureOut">
               <a:rPr lang="en-US" smtClean="0"/>
               <a:pPr/>
-              <a:t>5/20/2026</a:t>
+              <a:t>5/21/2026</a:t>
             </a:fld>
             <a:endParaRPr lang="en-US"/>
           </a:p>
@@ -2725,7 +2726,7 @@
             <a:fld id="{E80C50CD-E178-4744-9B35-B2F624D6C5E9}" type="datetimeFigureOut">
               <a:rPr lang="en-US" smtClean="0"/>
               <a:pPr/>
-              <a:t>5/20/2026</a:t>
+              <a:t>5/21/2026</a:t>
             </a:fld>
             <a:endParaRPr lang="en-US"/>
           </a:p>
@@ -2929,7 +2930,7 @@
             <a:fld id="{E80C50CD-E178-4744-9B35-B2F624D6C5E9}" type="datetimeFigureOut">
               <a:rPr lang="en-US" smtClean="0"/>
               <a:pPr/>
-              <a:t>5/20/2026</a:t>
+              <a:t>5/21/2026</a:t>
             </a:fld>
             <a:endParaRPr lang="en-US"/>
           </a:p>
@@ -3181,7 +3182,7 @@
             <a:fld id="{E80C50CD-E178-4744-9B35-B2F624D6C5E9}" type="datetimeFigureOut">
               <a:rPr lang="en-US" smtClean="0"/>
               <a:pPr/>
-              <a:t>5/20/2026</a:t>
+              <a:t>5/21/2026</a:t>
             </a:fld>
             <a:endParaRPr lang="en-US"/>
           </a:p>
@@ -3483,7 +3484,7 @@
             <a:fld id="{E80C50CD-E178-4744-9B35-B2F624D6C5E9}" type="datetimeFigureOut">
               <a:rPr lang="en-US" smtClean="0"/>
               <a:pPr/>
-              <a:t>5/20/2026</a:t>
+              <a:t>5/21/2026</a:t>
             </a:fld>
             <a:endParaRPr lang="en-US"/>
           </a:p>
@@ -3931,7 +3932,7 @@
             <a:fld id="{E80C50CD-E178-4744-9B35-B2F624D6C5E9}" type="datetimeFigureOut">
               <a:rPr lang="en-US" smtClean="0"/>
               <a:pPr/>
-              <a:t>5/20/2026</a:t>
+              <a:t>5/21/2026</a:t>
             </a:fld>
             <a:endParaRPr lang="en-US"/>
           </a:p>
@@ -4051,7 +4052,7 @@
             <a:fld id="{E80C50CD-E178-4744-9B35-B2F624D6C5E9}" type="datetimeFigureOut">
               <a:rPr lang="en-US" smtClean="0"/>
               <a:pPr/>
-              <a:t>5/20/2026</a:t>
+              <a:t>5/21/2026</a:t>
             </a:fld>
             <a:endParaRPr lang="en-US"/>
           </a:p>
@@ -4148,7 +4149,7 @@
             <a:fld id="{E80C50CD-E178-4744-9B35-B2F624D6C5E9}" type="datetimeFigureOut">
               <a:rPr lang="en-US" smtClean="0"/>
               <a:pPr/>
-              <a:t>5/20/2026</a:t>
+              <a:t>5/21/2026</a:t>
             </a:fld>
             <a:endParaRPr lang="en-US"/>
           </a:p>
@@ -4437,7 +4438,7 @@
             <a:fld id="{E80C50CD-E178-4744-9B35-B2F624D6C5E9}" type="datetimeFigureOut">
               <a:rPr lang="en-US" smtClean="0"/>
               <a:pPr/>
-              <a:t>5/20/2026</a:t>
+              <a:t>5/21/2026</a:t>
             </a:fld>
             <a:endParaRPr lang="en-US"/>
           </a:p>
@@ -4722,7 +4723,7 @@
             <a:fld id="{E80C50CD-E178-4744-9B35-B2F624D6C5E9}" type="datetimeFigureOut">
               <a:rPr lang="en-US" smtClean="0"/>
               <a:pPr/>
-              <a:t>5/20/2026</a:t>
+              <a:t>5/21/2026</a:t>
             </a:fld>
             <a:endParaRPr lang="en-US"/>
           </a:p>
@@ -5162,7 +5163,7 @@
             <a:fld id="{E80C50CD-E178-4744-9B35-B2F624D6C5E9}" type="datetimeFigureOut">
               <a:rPr lang="en-US" smtClean="0"/>
               <a:pPr/>
-              <a:t>5/20/2026</a:t>
+              <a:t>5/21/2026</a:t>
             </a:fld>
             <a:endParaRPr lang="en-US"/>
           </a:p>
@@ -7347,6 +7348,14 @@
               </a:rPr>
               <a:t>強攻撃</a:t>
             </a:r>
+            <a:r>
+              <a:rPr kumimoji="1" lang="en-US" altLang="ja-JP" b="1">
+                <a:solidFill>
+                  <a:schemeClr val="bg1"/>
+                </a:solidFill>
+              </a:rPr>
+              <a:t>(?)</a:t>
+            </a:r>
             <a:endParaRPr kumimoji="1" lang="en-US" altLang="ja-JP" b="1" dirty="0">
               <a:solidFill>
                 <a:schemeClr val="bg1"/>
@@ -7491,7 +7500,7 @@
                   <a:schemeClr val="bg1"/>
                 </a:solidFill>
               </a:rPr>
-              <a:t>バーストスキル</a:t>
+              <a:t>ウルト</a:t>
             </a:r>
             <a:endParaRPr kumimoji="1" lang="en-US" altLang="ja-JP" sz="3200" b="1" u="sng" dirty="0">
               <a:solidFill>
@@ -8372,6 +8381,148 @@
           <p:cNvPr id="2" name="タイトル 1">
             <a:extLst>
               <a:ext uri="{FF2B5EF4-FFF2-40B4-BE49-F238E27FC236}">
+                <a16:creationId xmlns:a16="http://schemas.microsoft.com/office/drawing/2014/main" id="{ADF5B93A-851F-5D57-65E9-1847CFC1E022}"/>
+              </a:ext>
+            </a:extLst>
+          </p:cNvPr>
+          <p:cNvSpPr>
+            <a:spLocks noGrp="1"/>
+          </p:cNvSpPr>
+          <p:nvPr>
+            <p:ph type="title"/>
+          </p:nvPr>
+        </p:nvSpPr>
+        <p:spPr>
+          <a:xfrm>
+            <a:off x="179387" y="267757"/>
+            <a:ext cx="8534400" cy="1507067"/>
+          </a:xfrm>
+        </p:spPr>
+        <p:txBody>
+          <a:bodyPr/>
+          <a:lstStyle/>
+          <a:p>
+            <a:r>
+              <a:rPr kumimoji="1" lang="ja-JP" altLang="en-US" dirty="0">
+                <a:solidFill>
+                  <a:schemeClr val="bg1"/>
+                </a:solidFill>
+              </a:rPr>
+              <a:t>②スキル</a:t>
+            </a:r>
+          </a:p>
+        </p:txBody>
+      </p:sp>
+      <p:pic>
+        <p:nvPicPr>
+          <p:cNvPr id="4" name="図 3" descr="『ステラーブレイド』初心者攻略：バトル・アクション編。基礎知識から応用まで、ジャストパリィや回避のコツを伝授【Stellar Blade ...">
+            <a:extLst>
+              <a:ext uri="{FF2B5EF4-FFF2-40B4-BE49-F238E27FC236}">
+                <a16:creationId xmlns:a16="http://schemas.microsoft.com/office/drawing/2014/main" id="{72BF849B-C2DE-FEDA-F797-F116C4A538FA}"/>
+              </a:ext>
+            </a:extLst>
+          </p:cNvPr>
+          <p:cNvPicPr>
+            <a:picLocks noChangeAspect="1"/>
+          </p:cNvPicPr>
+          <p:nvPr/>
+        </p:nvPicPr>
+        <p:blipFill>
+          <a:blip r:embed="rId2"/>
+          <a:stretch>
+            <a:fillRect/>
+          </a:stretch>
+        </p:blipFill>
+        <p:spPr>
+          <a:xfrm>
+            <a:off x="4886325" y="-85725"/>
+            <a:ext cx="7305675" cy="4105275"/>
+          </a:xfrm>
+          <a:prstGeom prst="rect">
+            <a:avLst/>
+          </a:prstGeom>
+          <a:ln>
+            <a:noFill/>
+          </a:ln>
+          <a:effectLst>
+            <a:softEdge rad="112500"/>
+          </a:effectLst>
+        </p:spPr>
+      </p:pic>
+      <p:sp>
+        <p:nvSpPr>
+          <p:cNvPr id="5" name="テキスト ボックス 4">
+            <a:extLst>
+              <a:ext uri="{FF2B5EF4-FFF2-40B4-BE49-F238E27FC236}">
+                <a16:creationId xmlns:a16="http://schemas.microsoft.com/office/drawing/2014/main" id="{F69EE46A-B858-B00E-CE54-0DE11AB6ADE9}"/>
+              </a:ext>
+            </a:extLst>
+          </p:cNvPr>
+          <p:cNvSpPr txBox="1"/>
+          <p:nvPr/>
+        </p:nvSpPr>
+        <p:spPr>
+          <a:xfrm>
+            <a:off x="342900" y="1621392"/>
+            <a:ext cx="3416320" cy="369332"/>
+          </a:xfrm>
+          <a:prstGeom prst="rect">
+            <a:avLst/>
+          </a:prstGeom>
+          <a:noFill/>
+        </p:spPr>
+        <p:txBody>
+          <a:bodyPr wrap="none" rtlCol="0">
+            <a:spAutoFit/>
+          </a:bodyPr>
+          <a:lstStyle/>
+          <a:p>
+            <a:r>
+              <a:rPr kumimoji="1" lang="ja-JP" altLang="en-US" dirty="0">
+                <a:solidFill>
+                  <a:schemeClr val="bg1"/>
+                </a:solidFill>
+              </a:rPr>
+              <a:t>アーマー付きの多段ヒット攻撃</a:t>
+            </a:r>
+          </a:p>
+        </p:txBody>
+      </p:sp>
+    </p:spTree>
+    <p:extLst>
+      <p:ext uri="{BB962C8B-B14F-4D97-AF65-F5344CB8AC3E}">
+        <p14:creationId xmlns:p14="http://schemas.microsoft.com/office/powerpoint/2010/main" val="1437836074"/>
+      </p:ext>
+    </p:extLst>
+  </p:cSld>
+  <p:clrMapOvr>
+    <a:masterClrMapping/>
+  </p:clrMapOvr>
+</p:sld>
+</file>
+
+<file path=ppt/slides/slide7.xml><?xml version="1.0" encoding="utf-8"?>
+<p:sld xmlns:a="http://schemas.openxmlformats.org/drawingml/2006/main" xmlns:r="http://schemas.openxmlformats.org/officeDocument/2006/relationships" xmlns:p="http://schemas.openxmlformats.org/presentationml/2006/main">
+  <p:cSld>
+    <p:spTree>
+      <p:nvGrpSpPr>
+        <p:cNvPr id="1" name=""/>
+        <p:cNvGrpSpPr/>
+        <p:nvPr/>
+      </p:nvGrpSpPr>
+      <p:grpSpPr>
+        <a:xfrm>
+          <a:off x="0" y="0"/>
+          <a:ext cx="0" cy="0"/>
+          <a:chOff x="0" y="0"/>
+          <a:chExt cx="0" cy="0"/>
+        </a:xfrm>
+      </p:grpSpPr>
+      <p:sp>
+        <p:nvSpPr>
+          <p:cNvPr id="2" name="タイトル 1">
+            <a:extLst>
+              <a:ext uri="{FF2B5EF4-FFF2-40B4-BE49-F238E27FC236}">
                 <a16:creationId xmlns:a16="http://schemas.microsoft.com/office/drawing/2014/main" id="{09E93D46-882E-8288-FE12-68783749CF6A}"/>
               </a:ext>
             </a:extLst>
@@ -8394,12 +8545,20 @@
           <a:lstStyle/>
           <a:p>
             <a:r>
+              <a:rPr lang="ja-JP" altLang="en-US" b="1" dirty="0">
+                <a:solidFill>
+                  <a:schemeClr val="bg1"/>
+                </a:solidFill>
+              </a:rPr>
+              <a:t>③</a:t>
+            </a:r>
+            <a:r>
               <a:rPr kumimoji="1" lang="ja-JP" altLang="en-US" b="1" dirty="0">
                 <a:solidFill>
                   <a:schemeClr val="bg1"/>
                 </a:solidFill>
               </a:rPr>
-              <a:t>②スキル　バーストスキル</a:t>
+              <a:t>ウルト</a:t>
             </a:r>
           </a:p>
         </p:txBody>
@@ -8418,7 +8577,7 @@
         </p:nvSpPr>
         <p:spPr>
           <a:xfrm>
-            <a:off x="635000" y="1739900"/>
+            <a:off x="568325" y="5733017"/>
             <a:ext cx="6487673" cy="369332"/>
           </a:xfrm>
           <a:prstGeom prst="rect">
@@ -8454,8 +8613,8 @@
         </p:nvSpPr>
         <p:spPr>
           <a:xfrm>
-            <a:off x="635000" y="2552700"/>
-            <a:ext cx="7109639" cy="923330"/>
+            <a:off x="239018" y="1389600"/>
+            <a:ext cx="6705720" cy="1200329"/>
           </a:xfrm>
           <a:prstGeom prst="rect">
             <a:avLst/>
@@ -8463,43 +8622,123 @@
           <a:noFill/>
         </p:spPr>
         <p:txBody>
-          <a:bodyPr wrap="none" rtlCol="0">
+          <a:bodyPr wrap="square" rtlCol="0">
             <a:spAutoFit/>
           </a:bodyPr>
           <a:lstStyle/>
           <a:p>
             <a:r>
-              <a:rPr kumimoji="1" lang="ja-JP" altLang="en-US" dirty="0"/>
-              <a:t>まだ決めてない</a:t>
-            </a:r>
-            <a:r>
-              <a:rPr kumimoji="1" lang="en-US" altLang="ja-JP" dirty="0"/>
-              <a:t>(</a:t>
-            </a:r>
-            <a:r>
-              <a:rPr kumimoji="1" lang="ja-JP" altLang="en-US" dirty="0"/>
-              <a:t>特にスキル</a:t>
-            </a:r>
-            <a:r>
-              <a:rPr kumimoji="1" lang="en-US" altLang="ja-JP" dirty="0"/>
-              <a:t>)</a:t>
-            </a:r>
-          </a:p>
-          <a:p>
-            <a:r>
-              <a:rPr kumimoji="1" lang="ja-JP" altLang="en-US" dirty="0"/>
+              <a:rPr kumimoji="1" lang="ja-JP" altLang="en-US" dirty="0">
+                <a:solidFill>
+                  <a:schemeClr val="bg1"/>
+                </a:solidFill>
+              </a:rPr>
               <a:t>スキル、バーストスキルには</a:t>
             </a:r>
             <a:br>
-              <a:rPr kumimoji="1" lang="en-US" altLang="ja-JP" dirty="0"/>
+              <a:rPr kumimoji="1" lang="en-US" altLang="ja-JP" dirty="0">
+                <a:solidFill>
+                  <a:schemeClr val="bg1"/>
+                </a:solidFill>
+              </a:rPr>
             </a:br>
             <a:r>
-              <a:rPr kumimoji="1" lang="ja-JP" altLang="en-US" dirty="0"/>
-              <a:t>それぞれゲージがあり、これらは通常攻撃、回避、パリィでたまる</a:t>
-            </a:r>
-          </a:p>
-        </p:txBody>
-      </p:sp>
+              <a:rPr kumimoji="1" lang="ja-JP" altLang="en-US" dirty="0">
+                <a:solidFill>
+                  <a:schemeClr val="bg1"/>
+                </a:solidFill>
+              </a:rPr>
+              <a:t>それぞれゲージがあり、</a:t>
+            </a:r>
+            <a:br>
+              <a:rPr kumimoji="1" lang="en-US" altLang="ja-JP" dirty="0">
+                <a:solidFill>
+                  <a:schemeClr val="bg1"/>
+                </a:solidFill>
+              </a:rPr>
+            </a:br>
+            <a:r>
+              <a:rPr kumimoji="1" lang="ja-JP" altLang="en-US" dirty="0">
+                <a:solidFill>
+                  <a:schemeClr val="bg1"/>
+                </a:solidFill>
+              </a:rPr>
+              <a:t>これらは通常攻撃、回避、パリィでたまる</a:t>
+            </a:r>
+            <a:br>
+              <a:rPr kumimoji="1" lang="en-US" altLang="ja-JP" dirty="0">
+                <a:solidFill>
+                  <a:schemeClr val="bg1"/>
+                </a:solidFill>
+              </a:rPr>
+            </a:br>
+            <a:r>
+              <a:rPr kumimoji="1" lang="ja-JP" altLang="en-US" dirty="0">
+                <a:solidFill>
+                  <a:schemeClr val="bg1"/>
+                </a:solidFill>
+              </a:rPr>
+              <a:t>ウルトはシェーダー必須</a:t>
+            </a:r>
+            <a:endParaRPr kumimoji="1" lang="en-US" altLang="ja-JP" dirty="0">
+              <a:solidFill>
+                <a:schemeClr val="bg1"/>
+              </a:solidFill>
+            </a:endParaRPr>
+          </a:p>
+        </p:txBody>
+      </p:sp>
+      <p:pic>
+        <p:nvPicPr>
+          <p:cNvPr id="6" name="図 5">
+            <a:extLst>
+              <a:ext uri="{FF2B5EF4-FFF2-40B4-BE49-F238E27FC236}">
+                <a16:creationId xmlns:a16="http://schemas.microsoft.com/office/drawing/2014/main" id="{D66B2392-37AD-B188-FED8-F1A96E2805EA}"/>
+              </a:ext>
+            </a:extLst>
+          </p:cNvPr>
+          <p:cNvPicPr>
+            <a:picLocks noChangeAspect="1"/>
+          </p:cNvPicPr>
+          <p:nvPr/>
+        </p:nvPicPr>
+        <p:blipFill>
+          <a:blip r:embed="rId2">
+            <a:extLst>
+              <a:ext uri="{28A0092B-C50C-407E-A947-70E740481C1C}">
+                <a14:useLocalDpi xmlns:a14="http://schemas.microsoft.com/office/drawing/2010/main" val="0"/>
+              </a:ext>
+            </a:extLst>
+          </a:blip>
+          <a:srcRect l="17265" r="17657"/>
+          <a:stretch>
+            <a:fillRect/>
+          </a:stretch>
+        </p:blipFill>
+        <p:spPr>
+          <a:xfrm>
+            <a:off x="6944738" y="228601"/>
+            <a:ext cx="4812287" cy="2733560"/>
+          </a:xfrm>
+          <a:prstGeom prst="rect">
+            <a:avLst/>
+          </a:prstGeom>
+          <a:ln w="38100" cap="sq">
+            <a:solidFill>
+              <a:srgbClr val="000000"/>
+            </a:solidFill>
+            <a:prstDash val="solid"/>
+            <a:miter lim="800000"/>
+          </a:ln>
+          <a:effectLst>
+            <a:outerShdw blurRad="50800" dist="38100" dir="2700000" algn="tl" rotWithShape="0">
+              <a:srgbClr val="000000">
+                <a:alpha val="43000"/>
+              </a:srgbClr>
+            </a:outerShdw>
+          </a:effectLst>
+        </p:spPr>
+      </p:pic>
     </p:spTree>
     <p:extLst>
       <p:ext uri="{BB962C8B-B14F-4D97-AF65-F5344CB8AC3E}">
@@ -8513,7 +8752,7 @@
 </p:sld>
 </file>
 
-<file path=ppt/slides/slide7.xml><?xml version="1.0" encoding="utf-8"?>
+<file path=ppt/slides/slide8.xml><?xml version="1.0" encoding="utf-8"?>
 <p:sld xmlns:a="http://schemas.openxmlformats.org/drawingml/2006/main" xmlns:r="http://schemas.openxmlformats.org/officeDocument/2006/relationships" xmlns:p="http://schemas.openxmlformats.org/presentationml/2006/main">
   <p:cSld>
     <p:spTree>

--- a/進捗/2026_summer企画書.pptx
+++ b/進捗/2026_summer企画書.pptx
@@ -311,7 +311,7 @@
             <a:fld id="{E80C50CD-E178-4744-9B35-B2F624D6C5E9}" type="datetimeFigureOut">
               <a:rPr lang="en-US" smtClean="0"/>
               <a:pPr/>
-              <a:t>5/21/2026</a:t>
+              <a:t>5/22/2026</a:t>
             </a:fld>
             <a:endParaRPr lang="en-US"/>
           </a:p>
@@ -749,7 +749,7 @@
             <a:fld id="{E80C50CD-E178-4744-9B35-B2F624D6C5E9}" type="datetimeFigureOut">
               <a:rPr lang="en-US" smtClean="0"/>
               <a:pPr/>
-              <a:t>5/21/2026</a:t>
+              <a:t>5/22/2026</a:t>
             </a:fld>
             <a:endParaRPr lang="en-US"/>
           </a:p>
@@ -1001,7 +1001,7 @@
             <a:fld id="{E80C50CD-E178-4744-9B35-B2F624D6C5E9}" type="datetimeFigureOut">
               <a:rPr lang="en-US" smtClean="0"/>
               <a:pPr/>
-              <a:t>5/21/2026</a:t>
+              <a:t>5/22/2026</a:t>
             </a:fld>
             <a:endParaRPr lang="en-US"/>
           </a:p>
@@ -1311,7 +1311,7 @@
             <a:fld id="{E80C50CD-E178-4744-9B35-B2F624D6C5E9}" type="datetimeFigureOut">
               <a:rPr lang="en-US" smtClean="0"/>
               <a:pPr/>
-              <a:t>5/21/2026</a:t>
+              <a:t>5/22/2026</a:t>
             </a:fld>
             <a:endParaRPr lang="en-US"/>
           </a:p>
@@ -1631,7 +1631,7 @@
             <a:fld id="{E80C50CD-E178-4744-9B35-B2F624D6C5E9}" type="datetimeFigureOut">
               <a:rPr lang="en-US" smtClean="0"/>
               <a:pPr/>
-              <a:t>5/21/2026</a:t>
+              <a:t>5/22/2026</a:t>
             </a:fld>
             <a:endParaRPr lang="en-US"/>
           </a:p>
@@ -1935,7 +1935,7 @@
             <a:fld id="{E80C50CD-E178-4744-9B35-B2F624D6C5E9}" type="datetimeFigureOut">
               <a:rPr lang="en-US" smtClean="0"/>
               <a:pPr/>
-              <a:t>5/21/2026</a:t>
+              <a:t>5/22/2026</a:t>
             </a:fld>
             <a:endParaRPr lang="en-US"/>
           </a:p>
@@ -2304,7 +2304,7 @@
             <a:fld id="{E80C50CD-E178-4744-9B35-B2F624D6C5E9}" type="datetimeFigureOut">
               <a:rPr lang="en-US" smtClean="0"/>
               <a:pPr/>
-              <a:t>5/21/2026</a:t>
+              <a:t>5/22/2026</a:t>
             </a:fld>
             <a:endParaRPr lang="en-US"/>
           </a:p>
@@ -2512,7 +2512,7 @@
             <a:fld id="{E80C50CD-E178-4744-9B35-B2F624D6C5E9}" type="datetimeFigureOut">
               <a:rPr lang="en-US" smtClean="0"/>
               <a:pPr/>
-              <a:t>5/21/2026</a:t>
+              <a:t>5/22/2026</a:t>
             </a:fld>
             <a:endParaRPr lang="en-US"/>
           </a:p>
@@ -2726,7 +2726,7 @@
             <a:fld id="{E80C50CD-E178-4744-9B35-B2F624D6C5E9}" type="datetimeFigureOut">
               <a:rPr lang="en-US" smtClean="0"/>
               <a:pPr/>
-              <a:t>5/21/2026</a:t>
+              <a:t>5/22/2026</a:t>
             </a:fld>
             <a:endParaRPr lang="en-US"/>
           </a:p>
@@ -2930,7 +2930,7 @@
             <a:fld id="{E80C50CD-E178-4744-9B35-B2F624D6C5E9}" type="datetimeFigureOut">
               <a:rPr lang="en-US" smtClean="0"/>
               <a:pPr/>
-              <a:t>5/21/2026</a:t>
+              <a:t>5/22/2026</a:t>
             </a:fld>
             <a:endParaRPr lang="en-US"/>
           </a:p>
@@ -3182,7 +3182,7 @@
             <a:fld id="{E80C50CD-E178-4744-9B35-B2F624D6C5E9}" type="datetimeFigureOut">
               <a:rPr lang="en-US" smtClean="0"/>
               <a:pPr/>
-              <a:t>5/21/2026</a:t>
+              <a:t>5/22/2026</a:t>
             </a:fld>
             <a:endParaRPr lang="en-US"/>
           </a:p>
@@ -3484,7 +3484,7 @@
             <a:fld id="{E80C50CD-E178-4744-9B35-B2F624D6C5E9}" type="datetimeFigureOut">
               <a:rPr lang="en-US" smtClean="0"/>
               <a:pPr/>
-              <a:t>5/21/2026</a:t>
+              <a:t>5/22/2026</a:t>
             </a:fld>
             <a:endParaRPr lang="en-US"/>
           </a:p>
@@ -3932,7 +3932,7 @@
             <a:fld id="{E80C50CD-E178-4744-9B35-B2F624D6C5E9}" type="datetimeFigureOut">
               <a:rPr lang="en-US" smtClean="0"/>
               <a:pPr/>
-              <a:t>5/21/2026</a:t>
+              <a:t>5/22/2026</a:t>
             </a:fld>
             <a:endParaRPr lang="en-US"/>
           </a:p>
@@ -4052,7 +4052,7 @@
             <a:fld id="{E80C50CD-E178-4744-9B35-B2F624D6C5E9}" type="datetimeFigureOut">
               <a:rPr lang="en-US" smtClean="0"/>
               <a:pPr/>
-              <a:t>5/21/2026</a:t>
+              <a:t>5/22/2026</a:t>
             </a:fld>
             <a:endParaRPr lang="en-US"/>
           </a:p>
@@ -4149,7 +4149,7 @@
             <a:fld id="{E80C50CD-E178-4744-9B35-B2F624D6C5E9}" type="datetimeFigureOut">
               <a:rPr lang="en-US" smtClean="0"/>
               <a:pPr/>
-              <a:t>5/21/2026</a:t>
+              <a:t>5/22/2026</a:t>
             </a:fld>
             <a:endParaRPr lang="en-US"/>
           </a:p>
@@ -4438,7 +4438,7 @@
             <a:fld id="{E80C50CD-E178-4744-9B35-B2F624D6C5E9}" type="datetimeFigureOut">
               <a:rPr lang="en-US" smtClean="0"/>
               <a:pPr/>
-              <a:t>5/21/2026</a:t>
+              <a:t>5/22/2026</a:t>
             </a:fld>
             <a:endParaRPr lang="en-US"/>
           </a:p>
@@ -4723,7 +4723,7 @@
             <a:fld id="{E80C50CD-E178-4744-9B35-B2F624D6C5E9}" type="datetimeFigureOut">
               <a:rPr lang="en-US" smtClean="0"/>
               <a:pPr/>
-              <a:t>5/21/2026</a:t>
+              <a:t>5/22/2026</a:t>
             </a:fld>
             <a:endParaRPr lang="en-US"/>
           </a:p>
@@ -5163,7 +5163,7 @@
             <a:fld id="{E80C50CD-E178-4744-9B35-B2F624D6C5E9}" type="datetimeFigureOut">
               <a:rPr lang="en-US" smtClean="0"/>
               <a:pPr/>
-              <a:t>5/21/2026</a:t>
+              <a:t>5/22/2026</a:t>
             </a:fld>
             <a:endParaRPr lang="en-US"/>
           </a:p>
@@ -8435,8 +8435,8 @@
         </p:blipFill>
         <p:spPr>
           <a:xfrm>
-            <a:off x="4886325" y="-85725"/>
-            <a:ext cx="7305675" cy="4105275"/>
+            <a:off x="6665912" y="198520"/>
+            <a:ext cx="3971925" cy="2231942"/>
           </a:xfrm>
           <a:prstGeom prst="rect">
             <a:avLst/>
@@ -8464,7 +8464,7 @@
         <p:spPr>
           <a:xfrm>
             <a:off x="342900" y="1621392"/>
-            <a:ext cx="3416320" cy="369332"/>
+            <a:ext cx="2723823" cy="369332"/>
           </a:xfrm>
           <a:prstGeom prst="rect">
             <a:avLst/>
@@ -8483,8 +8483,94 @@
                   <a:schemeClr val="bg1"/>
                 </a:solidFill>
               </a:rPr>
-              <a:t>アーマー付きの多段ヒット攻撃</a:t>
-            </a:r>
+              <a:t>アーマー付きの全体攻撃</a:t>
+            </a:r>
+          </a:p>
+        </p:txBody>
+      </p:sp>
+      <p:pic>
+        <p:nvPicPr>
+          <p:cNvPr id="8" name="図 7">
+            <a:extLst>
+              <a:ext uri="{FF2B5EF4-FFF2-40B4-BE49-F238E27FC236}">
+                <a16:creationId xmlns:a16="http://schemas.microsoft.com/office/drawing/2014/main" id="{BF23055E-D794-4B0F-9AFC-0B20B22DDB4C}"/>
+              </a:ext>
+            </a:extLst>
+          </p:cNvPr>
+          <p:cNvPicPr>
+            <a:picLocks noChangeAspect="1"/>
+          </p:cNvPicPr>
+          <p:nvPr/>
+        </p:nvPicPr>
+        <p:blipFill>
+          <a:blip r:embed="rId3">
+            <a:extLst>
+              <a:ext uri="{28A0092B-C50C-407E-A947-70E740481C1C}">
+                <a14:useLocalDpi xmlns:a14="http://schemas.microsoft.com/office/drawing/2010/main" val="0"/>
+              </a:ext>
+            </a:extLst>
+          </a:blip>
+          <a:stretch>
+            <a:fillRect/>
+          </a:stretch>
+        </p:blipFill>
+        <p:spPr>
+          <a:xfrm>
+            <a:off x="6603999" y="3886200"/>
+            <a:ext cx="4095750" cy="2303859"/>
+          </a:xfrm>
+          <a:prstGeom prst="rect">
+            <a:avLst/>
+          </a:prstGeom>
+          <a:ln>
+            <a:noFill/>
+          </a:ln>
+          <a:effectLst>
+            <a:softEdge rad="112500"/>
+          </a:effectLst>
+        </p:spPr>
+      </p:pic>
+      <p:sp>
+        <p:nvSpPr>
+          <p:cNvPr id="9" name="テキスト ボックス 8">
+            <a:extLst>
+              <a:ext uri="{FF2B5EF4-FFF2-40B4-BE49-F238E27FC236}">
+                <a16:creationId xmlns:a16="http://schemas.microsoft.com/office/drawing/2014/main" id="{26D08685-CE99-4E72-FF88-1B7F96B45427}"/>
+              </a:ext>
+            </a:extLst>
+          </p:cNvPr>
+          <p:cNvSpPr txBox="1"/>
+          <p:nvPr/>
+        </p:nvSpPr>
+        <p:spPr>
+          <a:xfrm>
+            <a:off x="8298251" y="2845841"/>
+            <a:ext cx="707245" cy="769441"/>
+          </a:xfrm>
+          <a:prstGeom prst="rect">
+            <a:avLst/>
+          </a:prstGeom>
+          <a:noFill/>
+        </p:spPr>
+        <p:txBody>
+          <a:bodyPr wrap="none" rtlCol="0">
+            <a:spAutoFit/>
+          </a:bodyPr>
+          <a:lstStyle/>
+          <a:p>
+            <a:r>
+              <a:rPr kumimoji="1" lang="en-US" altLang="ja-JP" sz="4400" dirty="0">
+                <a:solidFill>
+                  <a:schemeClr val="bg1"/>
+                </a:solidFill>
+              </a:rPr>
+              <a:t>or</a:t>
+            </a:r>
+            <a:endParaRPr kumimoji="1" lang="ja-JP" altLang="en-US" sz="4400" dirty="0">
+              <a:solidFill>
+                <a:schemeClr val="bg1"/>
+              </a:solidFill>
+            </a:endParaRPr>
           </a:p>
         </p:txBody>
       </p:sp>
